--- a/poleschak-social-media/praesentation/poleschak-social-media-masterplan.pptx
+++ b/poleschak-social-media/praesentation/poleschak-social-media-masterplan.pptx
@@ -3240,7 +3240,7 @@
                 <a:ea typeface="Poppins" pitchFamily="34" charset="-122"/>
                 <a:cs typeface="Poppins" pitchFamily="34" charset="-120"/>
               </a:rPr>
-              <a:t>Vorschlag für die Geschäftsführung · 07.10.2026 · [Dein Name]</a:t>
+              <a:t>Vorschlag für die Geschäftsführung · 07.10.2026 · Marlene Büder</a:t>
             </a:r>
             <a:endParaRPr lang="en-US" sz="1400" dirty="0"/>
           </a:p>
